--- a/docs/SurakshaAR-SIH2026-Idea.pptx
+++ b/docs/SurakshaAR-SIH2026-Idea.pptx
@@ -6214,7 +6214,7 @@
                 <a:latin typeface="Arial" pitchFamily="34" charset="0"/>
                 <a:cs typeface="Arial" pitchFamily="34" charset="0"/>
               </a:rPr>
-              <a:t>English, Hindi and Santali (Ol Chiki script), audio-first throughout for workers who read slowly or not at all.</a:t>
+              <a:t>Audio-first throughout, so a worker who reads slowly or not at all can still run the drill. English ships today; the string layer is script-agnostic and Hindi and Santali (Ol Chiki) are the next translation pass.</a:t>
             </a:r>
             <a:endParaRPr lang="en-US" sz="3200" u="sng" dirty="0">
               <a:solidFill>
@@ -6266,7 +6266,7 @@
                 <a:latin typeface="Arial" pitchFamily="34" charset="0"/>
                 <a:cs typeface="Arial" pitchFamily="34" charset="0"/>
               </a:rPr>
-              <a:t>A working release APK backed by 163 automated tests, not a mock-up.</a:t>
+              <a:t>A working release APK backed by 189 automated tests, not a mock-up.</a:t>
             </a:r>
             <a:endParaRPr lang="en-US" sz="3200" u="sng" dirty="0">
               <a:solidFill>
@@ -6669,7 +6669,7 @@
                 <a:latin typeface="Arial" pitchFamily="34" charset="0"/>
                 <a:cs typeface="Arial" pitchFamily="34" charset="0"/>
               </a:rPr>
-              <a:t>SQLite on the phone; Fastify and React compliance dashboard synced over local Wi-Fi, with a signed file bundle as the no-network fallback.</a:t>
+              <a:t>SQLite on the phone, with signed record bundles as the export format. The supervisor dashboard that consumes them is specified and not yet built; the bundle is what the phone already produces.</a:t>
             </a:r>
           </a:p>
         </p:txBody>
@@ -6742,7 +6742,7 @@
                 <a:latin typeface="Arial" pitchFamily="34" charset="0"/>
                 <a:cs typeface="Arial" pitchFamily="34" charset="0"/>
               </a:rPr>
-              <a:t>Room sensing: each camera frame is reduced to a 32×24 grid and traced upward from the worker’s feet, using brightness and texture together so a grey wall above a grey floor is still detected.</a:t>
+              <a:t>Room sensing: each camera frame is reduced to a 32×64 grid and traced upward from the worker’s feet, using brightness and texture together so a grey wall above a grey floor is still detected. Tall rather than square on purpose: rows are what set how precisely a doorway can be measured.</a:t>
             </a:r>
           </a:p>
           <a:p>
@@ -7223,7 +7223,7 @@
                 <a:latin typeface="Arial" pitchFamily="34" charset="0"/>
                 <a:cs typeface="Arial" pitchFamily="34" charset="0"/>
               </a:rPr>
-              <a:t>A release APK builds today, with 163 automated tests covering projection mathematics, environment detection, adaptive assessment and certificate cryptography.</a:t>
+              <a:t>A release APK builds today, with 189 automated tests covering projection mathematics, environment detection, adaptive assessment and certificate cryptography.</a:t>
             </a:r>
             <a:endParaRPr kumimoji="0" lang="en-US" sz="2800" b="0" i="0" u="none" strike="noStrike" kern="1200" cap="none" spc="0" normalizeH="0" baseline="0" noProof="0" dirty="0">
               <a:ln>
@@ -7266,7 +7266,7 @@
                 <a:latin typeface="Arial" pitchFamily="34" charset="0"/>
                 <a:cs typeface="Arial" pitchFamily="34" charset="0"/>
               </a:rPr>
-              <a:t>The dashboard runs on a supervisor’s laptop over a local hotspot: no cloud contract and no recurring cost per site.</a:t>
+              <a:t>Nothing in the design needs a cloud contract or a per-site recurring cost: records move as signed files, and the planned supervisor dashboard is a laptop on a local hotspot.</a:t>
             </a:r>
             <a:endParaRPr kumimoji="0" lang="en-US" sz="2800" b="0" i="0" u="none" strike="noStrike" kern="1200" cap="none" spc="0" normalizeH="0" baseline="0" noProof="0" dirty="0">
               <a:ln>
@@ -7509,7 +7509,7 @@
                 <a:latin typeface="Arial" pitchFamily="34" charset="0"/>
                 <a:cs typeface="Arial" pitchFamily="34" charset="0"/>
               </a:rPr>
-              <a:t>Santali is a low-resource language — the full Ol Chiki pipeline ships, but strings are badged for native review with Hindi fallback. No unverified safety wording is presented as authoritative.</a:t>
+              <a:t>Santali is a low-resource language — every translated string is badged for native review with a Hindi fallback before it is shown, so no unverified safety wording is ever presented as authoritative.</a:t>
             </a:r>
             <a:endParaRPr kumimoji="0" lang="en-US" sz="2800" b="0" i="0" u="none" strike="noStrike" kern="1200" cap="none" spc="0" normalizeH="0" baseline="0" noProof="0" dirty="0">
               <a:ln>
@@ -8195,7 +8195,7 @@
                 <a:ea typeface="ＭＳ Ｐゴシック" pitchFamily="1" charset="-128"/>
                 <a:cs typeface="Arial" pitchFamily="34" charset="0"/>
               </a:rPr>
-              <a:t>The dashboard surfaces the under-30-day cohort by name, so a supervisor can act before an accident rather than after one.</a:t>
+              <a:t>Signed records carry each worker’s days-since-induction, so the under-30-day cohort can be surfaced by name and acted on before an accident rather than after.</a:t>
             </a:r>
           </a:p>
         </p:txBody>
@@ -8295,7 +8295,7 @@
                 <a:ea typeface="ＭＳ Ｐゴシック" pitchFamily="1" charset="-128"/>
                 <a:cs typeface="Arial" pitchFamily="34" charset="0"/>
               </a:rPr>
-              <a:t>Social — training delivered in the worker’s own language and by audio, reaching the contract labour that headset programmes exclude entirely.</a:t>
+              <a:t>Social — audio-first delivery, with translation into the worker’s own language, reaching the contract labour that headset programmes exclude entirely.</a:t>
             </a:r>
           </a:p>
           <a:p>
